--- a/HW6/5-Графика в web-дизайне. Оптимизация графики.pptx
+++ b/HW6/5-Графика в web-дизайне. Оптимизация графики.pptx
@@ -12572,7 +12572,7 @@
       </p:grpSpPr>
       <p:pic>
         <p:nvPicPr>
-          <p:cNvPr id="4" name="Рисунок 3" descr="логотип STEP ACADEMY (белый).png"/>
+          <p:cNvPr id="4" name="Рисунок 3" descr=""/>
           <p:cNvPicPr>
             <a:picLocks noChangeAspect="1"/>
           </p:cNvPicPr>
@@ -23865,7 +23865,7 @@
       </p:grpSpPr>
       <p:pic>
         <p:nvPicPr>
-          <p:cNvPr id="113666" name="Picture 2" descr="https://basicuse.net/var/plain_site/storage/images/media/images/articles/prog_lang/textile/html_css/getting_started_with_bootstrap/glyphicons/61850-1-eng-GB/glyphicons_fit_content_width.png"/>
+          <p:cNvPr id="113666" name="Picture 2" descr=""/>
           <p:cNvPicPr>
             <a:picLocks noChangeAspect="1" noChangeArrowheads="1"/>
           </p:cNvPicPr>

--- a/HW6/5-Графика в web-дизайне. Оптимизация графики.pptx
+++ b/HW6/5-Графика в web-дизайне. Оптимизация графики.pptx
@@ -12656,7 +12656,7 @@
                   </a:schemeClr>
                 </a:solidFill>
               </a:rPr>
-              <a:t>Зуев Александр</a:t>
+              <a:t/>
             </a:r>
             <a:endParaRPr lang="ru-RU" sz="3600" b="1" i="1" dirty="0">
               <a:ln w="50800"/>
